--- a/generated/Tier 1 Broker Scorecards/Safer Haul Inc_Broker_Scorecard.pptx
+++ b/generated/Tier 1 Broker Scorecards/Safer Haul Inc_Broker_Scorecard.pptx
@@ -3357,7 +3357,7 @@
                         <a:rPr sz="800">
                           <a:latin typeface="Segoe UI"/>
                         </a:rPr>
-                        <a:t>$1,436,229.75 / $1,967,425.82 / $813,268.88</a:t>
+                        <a:t>$1,436,229.75 / $1,968,868.54 / $814,711.60</a:t>
                       </a:r>
                     </a:p>
                   </a:txBody>
@@ -3394,7 +3394,7 @@
                         <a:rPr sz="900">
                           <a:latin typeface="Segoe UI"/>
                         </a:rPr>
-                        <a:t>Tier 1  |  6.89% / 15.00%</a:t>
+                        <a:t>Tier 1  |  6.67% / 15.00%</a:t>
                       </a:r>
                     </a:p>
                   </a:txBody>
@@ -3431,7 +3431,7 @@
                         <a:rPr sz="900">
                           <a:latin typeface="Segoe UI"/>
                         </a:rPr>
-                        <a:t>$2,010,721.65  (40.4% achieved)</a:t>
+                        <a:t>$2,010,721.65  (40.5% achieved)</a:t>
                       </a:r>
                     </a:p>
                   </a:txBody>
@@ -3653,7 +3653,7 @@
                         <a:rPr sz="900">
                           <a:latin typeface="Segoe UI"/>
                         </a:rPr>
-                        <a:t>Fleet Subs: 22  |  Binds: 2</a:t>
+                        <a:t>Fleet Subs: 21  |  Binds: 0</a:t>
                       </a:r>
                     </a:p>
                   </a:txBody>
@@ -3690,7 +3690,7 @@
                         <a:rPr sz="900">
                           <a:latin typeface="Segoe UI"/>
                         </a:rPr>
-                        <a:t>Fleet Bound Premium: $187,084.03</a:t>
+                        <a:t>Fleet Bound Premium: $0.00</a:t>
                       </a:r>
                     </a:p>
                   </a:txBody>
@@ -3727,7 +3727,7 @@
                         <a:rPr sz="900">
                           <a:latin typeface="Segoe UI"/>
                         </a:rPr>
-                        <a:t>Fleet Book %: 23.0%</a:t>
+                        <a:t>Fleet Book %: 0.0%</a:t>
                       </a:r>
                     </a:p>
                   </a:txBody>
@@ -3766,7 +3766,7 @@
                         <a:rPr sz="900">
                           <a:latin typeface="Segoe UI"/>
                         </a:rPr>
-                        <a:t>Non-Fleet Subs: 486  |  Binds: 33</a:t>
+                        <a:t>Non-Fleet Subs: 489  |  Binds: 34</a:t>
                       </a:r>
                     </a:p>
                   </a:txBody>
@@ -3803,7 +3803,7 @@
                         <a:rPr sz="900">
                           <a:latin typeface="Segoe UI"/>
                         </a:rPr>
-                        <a:t>Non-Fleet Bound Premium: $626,184.85</a:t>
+                        <a:t>Non-Fleet Bound Premium: $814,711.60</a:t>
                       </a:r>
                     </a:p>
                   </a:txBody>
@@ -3840,7 +3840,7 @@
                         <a:rPr sz="900">
                           <a:latin typeface="Segoe UI"/>
                         </a:rPr>
-                        <a:t>Non-Fleet Book %: 77.0%</a:t>
+                        <a:t>Non-Fleet Book %: 100.0%</a:t>
                       </a:r>
                     </a:p>
                   </a:txBody>
@@ -4428,7 +4428,7 @@
                           </a:solidFill>
                           <a:latin typeface="Segoe UI"/>
                         </a:rPr>
-                        <a:t>45</a:t>
+                        <a:t>49</a:t>
                       </a:r>
                     </a:p>
                   </a:txBody>
@@ -4581,7 +4581,7 @@
                         <a:rPr sz="800">
                           <a:latin typeface="Segoe UI"/>
                         </a:rPr>
-                        <a:t>16.9%</a:t>
+                        <a:t>16.1%</a:t>
                       </a:r>
                     </a:p>
                   </a:txBody>
@@ -4664,7 +4664,7 @@
                         <a:rPr sz="800">
                           <a:latin typeface="Segoe UI"/>
                         </a:rPr>
-                        <a:t>16.2%</a:t>
+                        <a:t>15.3%</a:t>
                       </a:r>
                     </a:p>
                   </a:txBody>
@@ -4707,7 +4707,7 @@
                           </a:solidFill>
                           <a:latin typeface="Segoe UI"/>
                         </a:rPr>
-                        <a:t>11.1%</a:t>
+                        <a:t>10.2%</a:t>
                       </a:r>
                     </a:p>
                   </a:txBody>
@@ -4747,7 +4747,7 @@
                         <a:rPr sz="800">
                           <a:latin typeface="Segoe UI"/>
                         </a:rPr>
-                        <a:t>13.3%</a:t>
+                        <a:t>14.3%</a:t>
                       </a:r>
                     </a:p>
                   </a:txBody>
@@ -4866,7 +4866,7 @@
                         <a:rPr sz="800">
                           <a:latin typeface="Segoe UI"/>
                         </a:rPr>
-                        <a:t>20</a:t>
+                        <a:t>19</a:t>
                       </a:r>
                     </a:p>
                   </a:txBody>
@@ -4943,7 +4943,7 @@
                         <a:rPr sz="800">
                           <a:latin typeface="Segoe UI"/>
                         </a:rPr>
-                        <a:t>18</a:t>
+                        <a:t>17</a:t>
                       </a:r>
                     </a:p>
                   </a:txBody>
@@ -5020,7 +5020,7 @@
                         <a:rPr sz="800">
                           <a:latin typeface="Segoe UI"/>
                         </a:rPr>
-                        <a:t>13</a:t>
+                        <a:t>14</a:t>
                       </a:r>
                     </a:p>
                   </a:txBody>
@@ -5262,7 +5262,7 @@
                           </a:solidFill>
                           <a:latin typeface="Segoe UI"/>
                         </a:rPr>
-                        <a:t>$52.3K</a:t>
+                        <a:t>$53.7K</a:t>
                       </a:r>
                     </a:p>
                   </a:txBody>

--- a/generated/Tier 1 Broker Scorecards/Safer Haul Inc_Broker_Scorecard.pptx
+++ b/generated/Tier 1 Broker Scorecards/Safer Haul Inc_Broker_Scorecard.pptx
@@ -3394,7 +3394,7 @@
                         <a:rPr sz="900">
                           <a:latin typeface="Segoe UI"/>
                         </a:rPr>
-                        <a:t>Tier 1  |  6.67% / 15.00%</a:t>
+                        <a:t>Tier 1  |  6.63% / 15.00%</a:t>
                       </a:r>
                     </a:p>
                   </a:txBody>
@@ -3653,7 +3653,7 @@
                         <a:rPr sz="900">
                           <a:latin typeface="Segoe UI"/>
                         </a:rPr>
-                        <a:t>Fleet Subs: 21  |  Binds: 0</a:t>
+                        <a:t>Fleet Subs: 21  |  Binds: 1</a:t>
                       </a:r>
                     </a:p>
                   </a:txBody>
@@ -3690,7 +3690,7 @@
                         <a:rPr sz="900">
                           <a:latin typeface="Segoe UI"/>
                         </a:rPr>
-                        <a:t>Fleet Bound Premium: $0.00</a:t>
+                        <a:t>Fleet Bound Premium: $116,721.75</a:t>
                       </a:r>
                     </a:p>
                   </a:txBody>
@@ -3727,7 +3727,7 @@
                         <a:rPr sz="900">
                           <a:latin typeface="Segoe UI"/>
                         </a:rPr>
-                        <a:t>Fleet Book %: 0.0%</a:t>
+                        <a:t>Fleet Book %: 14.3%</a:t>
                       </a:r>
                     </a:p>
                   </a:txBody>
@@ -3766,7 +3766,7 @@
                         <a:rPr sz="900">
                           <a:latin typeface="Segoe UI"/>
                         </a:rPr>
-                        <a:t>Non-Fleet Subs: 489  |  Binds: 34</a:t>
+                        <a:t>Non-Fleet Subs: 492  |  Binds: 33</a:t>
                       </a:r>
                     </a:p>
                   </a:txBody>
@@ -3803,7 +3803,7 @@
                         <a:rPr sz="900">
                           <a:latin typeface="Segoe UI"/>
                         </a:rPr>
-                        <a:t>Non-Fleet Bound Premium: $814,711.60</a:t>
+                        <a:t>Non-Fleet Bound Premium: $697,989.85</a:t>
                       </a:r>
                     </a:p>
                   </a:txBody>
@@ -3840,7 +3840,7 @@
                         <a:rPr sz="900">
                           <a:latin typeface="Segoe UI"/>
                         </a:rPr>
-                        <a:t>Non-Fleet Book %: 100.0%</a:t>
+                        <a:t>Non-Fleet Book %: 85.7%</a:t>
                       </a:r>
                     </a:p>
                   </a:txBody>
@@ -4428,7 +4428,7 @@
                           </a:solidFill>
                           <a:latin typeface="Segoe UI"/>
                         </a:rPr>
-                        <a:t>49</a:t>
+                        <a:t>53</a:t>
                       </a:r>
                     </a:p>
                   </a:txBody>
@@ -4664,7 +4664,7 @@
                         <a:rPr sz="800">
                           <a:latin typeface="Segoe UI"/>
                         </a:rPr>
-                        <a:t>15.3%</a:t>
+                        <a:t>17.1%</a:t>
                       </a:r>
                     </a:p>
                   </a:txBody>
@@ -4707,7 +4707,7 @@
                           </a:solidFill>
                           <a:latin typeface="Segoe UI"/>
                         </a:rPr>
-                        <a:t>10.2%</a:t>
+                        <a:t>9.4%</a:t>
                       </a:r>
                     </a:p>
                   </a:txBody>
@@ -4747,7 +4747,7 @@
                         <a:rPr sz="800">
                           <a:latin typeface="Segoe UI"/>
                         </a:rPr>
-                        <a:t>14.3%</a:t>
+                        <a:t>13.3%</a:t>
                       </a:r>
                     </a:p>
                   </a:txBody>
@@ -4943,7 +4943,7 @@
                         <a:rPr sz="800">
                           <a:latin typeface="Segoe UI"/>
                         </a:rPr>
-                        <a:t>17</a:t>
+                        <a:t>19</a:t>
                       </a:r>
                     </a:p>
                   </a:txBody>
@@ -5020,7 +5020,7 @@
                         <a:rPr sz="800">
                           <a:latin typeface="Segoe UI"/>
                         </a:rPr>
-                        <a:t>14</a:t>
+                        <a:t>13</a:t>
                       </a:r>
                     </a:p>
                   </a:txBody>

--- a/generated/Tier 1 Broker Scorecards/Safer Haul Inc_Broker_Scorecard.pptx
+++ b/generated/Tier 1 Broker Scorecards/Safer Haul Inc_Broker_Scorecard.pptx
@@ -3357,7 +3357,7 @@
                         <a:rPr sz="800">
                           <a:latin typeface="Segoe UI"/>
                         </a:rPr>
-                        <a:t>$1,436,229.75 / $1,968,868.54 / $814,711.60</a:t>
+                        <a:t>$1,436,229.75 / $1,990,209.19 / $836,052.25</a:t>
                       </a:r>
                     </a:p>
                   </a:txBody>
@@ -3394,7 +3394,7 @@
                         <a:rPr sz="900">
                           <a:latin typeface="Segoe UI"/>
                         </a:rPr>
-                        <a:t>Tier 1  |  6.63% / 15.00%</a:t>
+                        <a:t>Tier 1  |  6.98% / 15.00%</a:t>
                       </a:r>
                     </a:p>
                   </a:txBody>
@@ -3431,7 +3431,7 @@
                         <a:rPr sz="900">
                           <a:latin typeface="Segoe UI"/>
                         </a:rPr>
-                        <a:t>$2,010,721.65  (40.5% achieved)</a:t>
+                        <a:t>$2,010,721.65  (41.6% achieved)</a:t>
                       </a:r>
                     </a:p>
                   </a:txBody>
@@ -3690,7 +3690,7 @@
                         <a:rPr sz="900">
                           <a:latin typeface="Segoe UI"/>
                         </a:rPr>
-                        <a:t>Fleet Bound Premium: $116,721.75</a:t>
+                        <a:t>Fleet Bound Premium: $112,502.60</a:t>
                       </a:r>
                     </a:p>
                   </a:txBody>
@@ -3727,7 +3727,7 @@
                         <a:rPr sz="900">
                           <a:latin typeface="Segoe UI"/>
                         </a:rPr>
-                        <a:t>Fleet Book %: 14.3%</a:t>
+                        <a:t>Fleet Book %: 13.5%</a:t>
                       </a:r>
                     </a:p>
                   </a:txBody>
@@ -3766,7 +3766,7 @@
                         <a:rPr sz="900">
                           <a:latin typeface="Segoe UI"/>
                         </a:rPr>
-                        <a:t>Non-Fleet Subs: 492  |  Binds: 33</a:t>
+                        <a:t>Non-Fleet Subs: 495  |  Binds: 35</a:t>
                       </a:r>
                     </a:p>
                   </a:txBody>
@@ -3803,7 +3803,7 @@
                         <a:rPr sz="900">
                           <a:latin typeface="Segoe UI"/>
                         </a:rPr>
-                        <a:t>Non-Fleet Bound Premium: $697,989.85</a:t>
+                        <a:t>Non-Fleet Bound Premium: $723,549.65</a:t>
                       </a:r>
                     </a:p>
                   </a:txBody>
@@ -3840,7 +3840,7 @@
                         <a:rPr sz="900">
                           <a:latin typeface="Segoe UI"/>
                         </a:rPr>
-                        <a:t>Non-Fleet Book %: 85.7%</a:t>
+                        <a:t>Non-Fleet Book %: 86.5%</a:t>
                       </a:r>
                     </a:p>
                   </a:txBody>
@@ -4428,7 +4428,7 @@
                           </a:solidFill>
                           <a:latin typeface="Segoe UI"/>
                         </a:rPr>
-                        <a:t>53</a:t>
+                        <a:t>57</a:t>
                       </a:r>
                     </a:p>
                   </a:txBody>
@@ -4707,7 +4707,7 @@
                           </a:solidFill>
                           <a:latin typeface="Segoe UI"/>
                         </a:rPr>
-                        <a:t>9.4%</a:t>
+                        <a:t>14.0%</a:t>
                       </a:r>
                     </a:p>
                   </a:txBody>
@@ -4983,7 +4983,7 @@
                           </a:solidFill>
                           <a:latin typeface="Segoe UI"/>
                         </a:rPr>
-                        <a:t>5</a:t>
+                        <a:t>8</a:t>
                       </a:r>
                     </a:p>
                   </a:txBody>
@@ -5258,11 +5258,11 @@
                       <a:r>
                         <a:rPr sz="800" b="1">
                           <a:solidFill>
-                            <a:srgbClr val="DC2626"/>
+                            <a:srgbClr val="059669"/>
                           </a:solidFill>
                           <a:latin typeface="Segoe UI"/>
                         </a:rPr>
-                        <a:t>$53.7K</a:t>
+                        <a:t>$75.0K</a:t>
                       </a:r>
                     </a:p>
                   </a:txBody>
@@ -5339,10 +5339,13 @@
                     <a:p>
                       <a:pPr algn="ctr"/>
                       <a:r>
-                        <a:rPr sz="800">
+                        <a:rPr sz="800" b="1">
+                          <a:solidFill>
+                            <a:srgbClr val="DC2626"/>
+                          </a:solidFill>
                           <a:latin typeface="Segoe UI"/>
                         </a:rPr>
-                        <a:t/>
+                        <a:t>$15.4K</a:t>
                       </a:r>
                     </a:p>
                   </a:txBody>

--- a/generated/Tier 1 Broker Scorecards/Safer Haul Inc_Broker_Scorecard.pptx
+++ b/generated/Tier 1 Broker Scorecards/Safer Haul Inc_Broker_Scorecard.pptx
@@ -3357,7 +3357,7 @@
                         <a:rPr sz="800">
                           <a:latin typeface="Segoe UI"/>
                         </a:rPr>
-                        <a:t>$1,436,229.75 / $1,990,209.19 / $836,052.25</a:t>
+                        <a:t>$1,436,229.75 / $2,003,481.26 / $849,324.32</a:t>
                       </a:r>
                     </a:p>
                   </a:txBody>
@@ -3394,7 +3394,7 @@
                         <a:rPr sz="900">
                           <a:latin typeface="Segoe UI"/>
                         </a:rPr>
-                        <a:t>Tier 1  |  6.98% / 15.00%</a:t>
+                        <a:t>Tier 1  |  7.06% / 15.00%</a:t>
                       </a:r>
                     </a:p>
                   </a:txBody>
@@ -3431,7 +3431,7 @@
                         <a:rPr sz="900">
                           <a:latin typeface="Segoe UI"/>
                         </a:rPr>
-                        <a:t>$2,010,721.65  (41.6% achieved)</a:t>
+                        <a:t>$2,010,721.65  (42.2% achieved)</a:t>
                       </a:r>
                     </a:p>
                   </a:txBody>
@@ -3690,7 +3690,7 @@
                         <a:rPr sz="900">
                           <a:latin typeface="Segoe UI"/>
                         </a:rPr>
-                        <a:t>Fleet Bound Premium: $112,502.60</a:t>
+                        <a:t>Fleet Bound Premium: $111,830.26</a:t>
                       </a:r>
                     </a:p>
                   </a:txBody>
@@ -3727,7 +3727,7 @@
                         <a:rPr sz="900">
                           <a:latin typeface="Segoe UI"/>
                         </a:rPr>
-                        <a:t>Fleet Book %: 13.5%</a:t>
+                        <a:t>Fleet Book %: 13.2%</a:t>
                       </a:r>
                     </a:p>
                   </a:txBody>
@@ -3766,7 +3766,7 @@
                         <a:rPr sz="900">
                           <a:latin typeface="Segoe UI"/>
                         </a:rPr>
-                        <a:t>Non-Fleet Subs: 495  |  Binds: 35</a:t>
+                        <a:t>Non-Fleet Subs: 503  |  Binds: 36</a:t>
                       </a:r>
                     </a:p>
                   </a:txBody>
@@ -3803,7 +3803,7 @@
                         <a:rPr sz="900">
                           <a:latin typeface="Segoe UI"/>
                         </a:rPr>
-                        <a:t>Non-Fleet Bound Premium: $723,549.65</a:t>
+                        <a:t>Non-Fleet Bound Premium: $737,494.06</a:t>
                       </a:r>
                     </a:p>
                   </a:txBody>
@@ -3840,7 +3840,7 @@
                         <a:rPr sz="900">
                           <a:latin typeface="Segoe UI"/>
                         </a:rPr>
-                        <a:t>Non-Fleet Book %: 86.5%</a:t>
+                        <a:t>Non-Fleet Book %: 86.8%</a:t>
                       </a:r>
                     </a:p>
                   </a:txBody>
@@ -4428,7 +4428,7 @@
                           </a:solidFill>
                           <a:latin typeface="Segoe UI"/>
                         </a:rPr>
-                        <a:t>57</a:t>
+                        <a:t>65</a:t>
                       </a:r>
                     </a:p>
                   </a:txBody>
@@ -4581,7 +4581,7 @@
                         <a:rPr sz="800">
                           <a:latin typeface="Segoe UI"/>
                         </a:rPr>
-                        <a:t>16.1%</a:t>
+                        <a:t>16.9%</a:t>
                       </a:r>
                     </a:p>
                   </a:txBody>
@@ -4664,7 +4664,7 @@
                         <a:rPr sz="800">
                           <a:latin typeface="Segoe UI"/>
                         </a:rPr>
-                        <a:t>17.1%</a:t>
+                        <a:t>16.2%</a:t>
                       </a:r>
                     </a:p>
                   </a:txBody>
@@ -4707,7 +4707,7 @@
                           </a:solidFill>
                           <a:latin typeface="Segoe UI"/>
                         </a:rPr>
-                        <a:t>14.0%</a:t>
+                        <a:t>13.8%</a:t>
                       </a:r>
                     </a:p>
                   </a:txBody>
@@ -4866,7 +4866,7 @@
                         <a:rPr sz="800">
                           <a:latin typeface="Segoe UI"/>
                         </a:rPr>
-                        <a:t>19</a:t>
+                        <a:t>20</a:t>
                       </a:r>
                     </a:p>
                   </a:txBody>
@@ -4943,7 +4943,7 @@
                         <a:rPr sz="800">
                           <a:latin typeface="Segoe UI"/>
                         </a:rPr>
-                        <a:t>19</a:t>
+                        <a:t>18</a:t>
                       </a:r>
                     </a:p>
                   </a:txBody>
@@ -4983,7 +4983,7 @@
                           </a:solidFill>
                           <a:latin typeface="Segoe UI"/>
                         </a:rPr>
-                        <a:t>8</a:t>
+                        <a:t>9</a:t>
                       </a:r>
                     </a:p>
                   </a:txBody>
@@ -5262,7 +5262,7 @@
                           </a:solidFill>
                           <a:latin typeface="Segoe UI"/>
                         </a:rPr>
-                        <a:t>$75.0K</a:t>
+                        <a:t>$88.3K</a:t>
                       </a:r>
                     </a:p>
                   </a:txBody>

--- a/generated/Tier 1 Broker Scorecards/Safer Haul Inc_Broker_Scorecard.pptx
+++ b/generated/Tier 1 Broker Scorecards/Safer Haul Inc_Broker_Scorecard.pptx
@@ -3394,7 +3394,7 @@
                         <a:rPr sz="900">
                           <a:latin typeface="Segoe UI"/>
                         </a:rPr>
-                        <a:t>Tier 1  |  7.06% / 15.00%</a:t>
+                        <a:t>Tier 1  |  6.78% / 15.00%</a:t>
                       </a:r>
                     </a:p>
                   </a:txBody>
@@ -3690,7 +3690,7 @@
                         <a:rPr sz="900">
                           <a:latin typeface="Segoe UI"/>
                         </a:rPr>
-                        <a:t>Fleet Bound Premium: $111,830.26</a:t>
+                        <a:t>Fleet Bound Premium: $114,762.60</a:t>
                       </a:r>
                     </a:p>
                   </a:txBody>
@@ -3727,7 +3727,7 @@
                         <a:rPr sz="900">
                           <a:latin typeface="Segoe UI"/>
                         </a:rPr>
-                        <a:t>Fleet Book %: 13.2%</a:t>
+                        <a:t>Fleet Book %: 13.5%</a:t>
                       </a:r>
                     </a:p>
                   </a:txBody>
@@ -3766,7 +3766,7 @@
                         <a:rPr sz="900">
                           <a:latin typeface="Segoe UI"/>
                         </a:rPr>
-                        <a:t>Non-Fleet Subs: 503  |  Binds: 36</a:t>
+                        <a:t>Non-Fleet Subs: 510  |  Binds: 35</a:t>
                       </a:r>
                     </a:p>
                   </a:txBody>
@@ -3803,7 +3803,7 @@
                         <a:rPr sz="900">
                           <a:latin typeface="Segoe UI"/>
                         </a:rPr>
-                        <a:t>Non-Fleet Bound Premium: $737,494.06</a:t>
+                        <a:t>Non-Fleet Bound Premium: $734,561.72</a:t>
                       </a:r>
                     </a:p>
                   </a:txBody>
@@ -3840,7 +3840,7 @@
                         <a:rPr sz="900">
                           <a:latin typeface="Segoe UI"/>
                         </a:rPr>
-                        <a:t>Non-Fleet Book %: 86.8%</a:t>
+                        <a:t>Non-Fleet Book %: 86.5%</a:t>
                       </a:r>
                     </a:p>
                   </a:txBody>
@@ -4428,7 +4428,7 @@
                           </a:solidFill>
                           <a:latin typeface="Segoe UI"/>
                         </a:rPr>
-                        <a:t>65</a:t>
+                        <a:t>73</a:t>
                       </a:r>
                     </a:p>
                   </a:txBody>
@@ -4581,7 +4581,7 @@
                         <a:rPr sz="800">
                           <a:latin typeface="Segoe UI"/>
                         </a:rPr>
-                        <a:t>16.9%</a:t>
+                        <a:t>15.3%</a:t>
                       </a:r>
                     </a:p>
                   </a:txBody>
@@ -4664,7 +4664,7 @@
                         <a:rPr sz="800">
                           <a:latin typeface="Segoe UI"/>
                         </a:rPr>
-                        <a:t>16.2%</a:t>
+                        <a:t>15.3%</a:t>
                       </a:r>
                     </a:p>
                   </a:txBody>
@@ -4707,7 +4707,7 @@
                           </a:solidFill>
                           <a:latin typeface="Segoe UI"/>
                         </a:rPr>
-                        <a:t>13.8%</a:t>
+                        <a:t>12.3%</a:t>
                       </a:r>
                     </a:p>
                   </a:txBody>
@@ -4747,7 +4747,7 @@
                         <a:rPr sz="800">
                           <a:latin typeface="Segoe UI"/>
                         </a:rPr>
-                        <a:t>13.3%</a:t>
+                        <a:t>12.2%</a:t>
                       </a:r>
                     </a:p>
                   </a:txBody>
@@ -4866,7 +4866,7 @@
                         <a:rPr sz="800">
                           <a:latin typeface="Segoe UI"/>
                         </a:rPr>
-                        <a:t>20</a:t>
+                        <a:t>18</a:t>
                       </a:r>
                     </a:p>
                   </a:txBody>
@@ -4943,7 +4943,7 @@
                         <a:rPr sz="800">
                           <a:latin typeface="Segoe UI"/>
                         </a:rPr>
-                        <a:t>18</a:t>
+                        <a:t>17</a:t>
                       </a:r>
                     </a:p>
                   </a:txBody>
@@ -5020,7 +5020,7 @@
                         <a:rPr sz="800">
                           <a:latin typeface="Segoe UI"/>
                         </a:rPr>
-                        <a:t>13</a:t>
+                        <a:t>12</a:t>
                       </a:r>
                     </a:p>
                   </a:txBody>

--- a/generated/Tier 1 Broker Scorecards/Safer Haul Inc_Broker_Scorecard.pptx
+++ b/generated/Tier 1 Broker Scorecards/Safer Haul Inc_Broker_Scorecard.pptx
@@ -4664,7 +4664,7 @@
                         <a:rPr sz="800">
                           <a:latin typeface="Segoe UI"/>
                         </a:rPr>
-                        <a:t>15.3%</a:t>
+                        <a:t>17.1%</a:t>
                       </a:r>
                     </a:p>
                   </a:txBody>
@@ -4747,7 +4747,7 @@
                         <a:rPr sz="800">
                           <a:latin typeface="Segoe UI"/>
                         </a:rPr>
-                        <a:t>12.2%</a:t>
+                        <a:t>13.3%</a:t>
                       </a:r>
                     </a:p>
                   </a:txBody>
@@ -4943,7 +4943,7 @@
                         <a:rPr sz="800">
                           <a:latin typeface="Segoe UI"/>
                         </a:rPr>
-                        <a:t>17</a:t>
+                        <a:t>19</a:t>
                       </a:r>
                     </a:p>
                   </a:txBody>
@@ -5020,7 +5020,7 @@
                         <a:rPr sz="800">
                           <a:latin typeface="Segoe UI"/>
                         </a:rPr>
-                        <a:t>12</a:t>
+                        <a:t>13</a:t>
                       </a:r>
                     </a:p>
                   </a:txBody>

--- a/generated/Tier 1 Broker Scorecards/Safer Haul Inc_Broker_Scorecard.pptx
+++ b/generated/Tier 1 Broker Scorecards/Safer Haul Inc_Broker_Scorecard.pptx
@@ -4581,7 +4581,7 @@
                         <a:rPr sz="800">
                           <a:latin typeface="Segoe UI"/>
                         </a:rPr>
-                        <a:t>15.3%</a:t>
+                        <a:t>16.1%</a:t>
                       </a:r>
                     </a:p>
                   </a:txBody>
@@ -4664,7 +4664,7 @@
                         <a:rPr sz="800">
                           <a:latin typeface="Segoe UI"/>
                         </a:rPr>
-                        <a:t>17.1%</a:t>
+                        <a:t>16.2%</a:t>
                       </a:r>
                     </a:p>
                   </a:txBody>
@@ -4747,7 +4747,7 @@
                         <a:rPr sz="800">
                           <a:latin typeface="Segoe UI"/>
                         </a:rPr>
-                        <a:t>13.3%</a:t>
+                        <a:t>14.3%</a:t>
                       </a:r>
                     </a:p>
                   </a:txBody>
@@ -4866,7 +4866,7 @@
                         <a:rPr sz="800">
                           <a:latin typeface="Segoe UI"/>
                         </a:rPr>
-                        <a:t>18</a:t>
+                        <a:t>19</a:t>
                       </a:r>
                     </a:p>
                   </a:txBody>
@@ -4943,7 +4943,7 @@
                         <a:rPr sz="800">
                           <a:latin typeface="Segoe UI"/>
                         </a:rPr>
-                        <a:t>19</a:t>
+                        <a:t>18</a:t>
                       </a:r>
                     </a:p>
                   </a:txBody>
@@ -5020,7 +5020,7 @@
                         <a:rPr sz="800">
                           <a:latin typeface="Segoe UI"/>
                         </a:rPr>
-                        <a:t>13</a:t>
+                        <a:t>14</a:t>
                       </a:r>
                     </a:p>
                   </a:txBody>

--- a/generated/Tier 1 Broker Scorecards/Safer Haul Inc_Broker_Scorecard.pptx
+++ b/generated/Tier 1 Broker Scorecards/Safer Haul Inc_Broker_Scorecard.pptx
@@ -3394,7 +3394,7 @@
                         <a:rPr sz="900">
                           <a:latin typeface="Segoe UI"/>
                         </a:rPr>
-                        <a:t>Tier 1  |  6.78% / 15.00%</a:t>
+                        <a:t>Tier 1  |  6.97% / 15.00%</a:t>
                       </a:r>
                     </a:p>
                   </a:txBody>
@@ -3690,7 +3690,7 @@
                         <a:rPr sz="900">
                           <a:latin typeface="Segoe UI"/>
                         </a:rPr>
-                        <a:t>Fleet Bound Premium: $114,762.60</a:t>
+                        <a:t>Fleet Bound Premium: $111,830.26</a:t>
                       </a:r>
                     </a:p>
                   </a:txBody>
@@ -3727,7 +3727,7 @@
                         <a:rPr sz="900">
                           <a:latin typeface="Segoe UI"/>
                         </a:rPr>
-                        <a:t>Fleet Book %: 13.5%</a:t>
+                        <a:t>Fleet Book %: 13.2%</a:t>
                       </a:r>
                     </a:p>
                   </a:txBody>
@@ -3766,7 +3766,7 @@
                         <a:rPr sz="900">
                           <a:latin typeface="Segoe UI"/>
                         </a:rPr>
-                        <a:t>Non-Fleet Subs: 510  |  Binds: 35</a:t>
+                        <a:t>Non-Fleet Subs: 510  |  Binds: 36</a:t>
                       </a:r>
                     </a:p>
                   </a:txBody>
@@ -3803,7 +3803,7 @@
                         <a:rPr sz="900">
                           <a:latin typeface="Segoe UI"/>
                         </a:rPr>
-                        <a:t>Non-Fleet Bound Premium: $734,561.72</a:t>
+                        <a:t>Non-Fleet Bound Premium: $737,494.06</a:t>
                       </a:r>
                     </a:p>
                   </a:txBody>
@@ -3840,7 +3840,7 @@
                         <a:rPr sz="900">
                           <a:latin typeface="Segoe UI"/>
                         </a:rPr>
-                        <a:t>Non-Fleet Book %: 86.5%</a:t>
+                        <a:t>Non-Fleet Book %: 86.8%</a:t>
                       </a:r>
                     </a:p>
                   </a:txBody>
@@ -4581,7 +4581,7 @@
                         <a:rPr sz="800">
                           <a:latin typeface="Segoe UI"/>
                         </a:rPr>
-                        <a:t>16.1%</a:t>
+                        <a:t>16.9%</a:t>
                       </a:r>
                     </a:p>
                   </a:txBody>
@@ -4664,7 +4664,7 @@
                         <a:rPr sz="800">
                           <a:latin typeface="Segoe UI"/>
                         </a:rPr>
-                        <a:t>16.2%</a:t>
+                        <a:t>17.1%</a:t>
                       </a:r>
                     </a:p>
                   </a:txBody>
@@ -4747,7 +4747,7 @@
                         <a:rPr sz="800">
                           <a:latin typeface="Segoe UI"/>
                         </a:rPr>
-                        <a:t>14.3%</a:t>
+                        <a:t>12.2%</a:t>
                       </a:r>
                     </a:p>
                   </a:txBody>
@@ -4866,7 +4866,7 @@
                         <a:rPr sz="800">
                           <a:latin typeface="Segoe UI"/>
                         </a:rPr>
-                        <a:t>19</a:t>
+                        <a:t>20</a:t>
                       </a:r>
                     </a:p>
                   </a:txBody>
@@ -4943,7 +4943,7 @@
                         <a:rPr sz="800">
                           <a:latin typeface="Segoe UI"/>
                         </a:rPr>
-                        <a:t>18</a:t>
+                        <a:t>19</a:t>
                       </a:r>
                     </a:p>
                   </a:txBody>
@@ -5020,7 +5020,7 @@
                         <a:rPr sz="800">
                           <a:latin typeface="Segoe UI"/>
                         </a:rPr>
-                        <a:t>14</a:t>
+                        <a:t>12</a:t>
                       </a:r>
                     </a:p>
                   </a:txBody>

--- a/generated/Tier 1 Broker Scorecards/Safer Haul Inc_Broker_Scorecard.pptx
+++ b/generated/Tier 1 Broker Scorecards/Safer Haul Inc_Broker_Scorecard.pptx
@@ -3394,7 +3394,7 @@
                         <a:rPr sz="900">
                           <a:latin typeface="Segoe UI"/>
                         </a:rPr>
-                        <a:t>Tier 1  |  6.97% / 15.00%</a:t>
+                        <a:t>Tier 1  |  6.54% / 15.00%</a:t>
                       </a:r>
                     </a:p>
                   </a:txBody>
@@ -3690,7 +3690,7 @@
                         <a:rPr sz="900">
                           <a:latin typeface="Segoe UI"/>
                         </a:rPr>
-                        <a:t>Fleet Bound Premium: $111,830.26</a:t>
+                        <a:t>Fleet Bound Premium: $115,287.41</a:t>
                       </a:r>
                     </a:p>
                   </a:txBody>
@@ -3727,7 +3727,7 @@
                         <a:rPr sz="900">
                           <a:latin typeface="Segoe UI"/>
                         </a:rPr>
-                        <a:t>Fleet Book %: 13.2%</a:t>
+                        <a:t>Fleet Book %: 13.6%</a:t>
                       </a:r>
                     </a:p>
                   </a:txBody>
@@ -3766,7 +3766,7 @@
                         <a:rPr sz="900">
                           <a:latin typeface="Segoe UI"/>
                         </a:rPr>
-                        <a:t>Non-Fleet Subs: 510  |  Binds: 36</a:t>
+                        <a:t>Non-Fleet Subs: 514  |  Binds: 34</a:t>
                       </a:r>
                     </a:p>
                   </a:txBody>
@@ -3803,7 +3803,7 @@
                         <a:rPr sz="900">
                           <a:latin typeface="Segoe UI"/>
                         </a:rPr>
-                        <a:t>Non-Fleet Bound Premium: $737,494.06</a:t>
+                        <a:t>Non-Fleet Bound Premium: $734,036.91</a:t>
                       </a:r>
                     </a:p>
                   </a:txBody>
@@ -3840,7 +3840,7 @@
                         <a:rPr sz="900">
                           <a:latin typeface="Segoe UI"/>
                         </a:rPr>
-                        <a:t>Non-Fleet Book %: 86.8%</a:t>
+                        <a:t>Non-Fleet Book %: 86.4%</a:t>
                       </a:r>
                     </a:p>
                   </a:txBody>
@@ -4428,7 +4428,7 @@
                           </a:solidFill>
                           <a:latin typeface="Segoe UI"/>
                         </a:rPr>
-                        <a:t>73</a:t>
+                        <a:t>79</a:t>
                       </a:r>
                     </a:p>
                   </a:txBody>
@@ -4581,7 +4581,7 @@
                         <a:rPr sz="800">
                           <a:latin typeface="Segoe UI"/>
                         </a:rPr>
-                        <a:t>16.9%</a:t>
+                        <a:t>15.3%</a:t>
                       </a:r>
                     </a:p>
                   </a:txBody>
@@ -4664,7 +4664,7 @@
                         <a:rPr sz="800">
                           <a:latin typeface="Segoe UI"/>
                         </a:rPr>
-                        <a:t>17.1%</a:t>
+                        <a:t>16.2%</a:t>
                       </a:r>
                     </a:p>
                   </a:txBody>
@@ -4707,7 +4707,7 @@
                           </a:solidFill>
                           <a:latin typeface="Segoe UI"/>
                         </a:rPr>
-                        <a:t>12.3%</a:t>
+                        <a:t>11.4%</a:t>
                       </a:r>
                     </a:p>
                   </a:txBody>
@@ -4866,7 +4866,7 @@
                         <a:rPr sz="800">
                           <a:latin typeface="Segoe UI"/>
                         </a:rPr>
-                        <a:t>20</a:t>
+                        <a:t>18</a:t>
                       </a:r>
                     </a:p>
                   </a:txBody>
@@ -4943,7 +4943,7 @@
                         <a:rPr sz="800">
                           <a:latin typeface="Segoe UI"/>
                         </a:rPr>
-                        <a:t>19</a:t>
+                        <a:t>18</a:t>
                       </a:r>
                     </a:p>
                   </a:txBody>

--- a/generated/Tier 1 Broker Scorecards/Safer Haul Inc_Broker_Scorecard.pptx
+++ b/generated/Tier 1 Broker Scorecards/Safer Haul Inc_Broker_Scorecard.pptx
@@ -3394,7 +3394,7 @@
                         <a:rPr sz="900">
                           <a:latin typeface="Segoe UI"/>
                         </a:rPr>
-                        <a:t>Tier 1  |  6.54% / 15.00%</a:t>
+                        <a:t>Tier 1  |  6.72% / 15.00%</a:t>
                       </a:r>
                     </a:p>
                   </a:txBody>
@@ -3690,7 +3690,7 @@
                         <a:rPr sz="900">
                           <a:latin typeface="Segoe UI"/>
                         </a:rPr>
-                        <a:t>Fleet Bound Premium: $115,287.41</a:t>
+                        <a:t>Fleet Bound Premium: $114,195.75</a:t>
                       </a:r>
                     </a:p>
                   </a:txBody>
@@ -3727,7 +3727,7 @@
                         <a:rPr sz="900">
                           <a:latin typeface="Segoe UI"/>
                         </a:rPr>
-                        <a:t>Fleet Book %: 13.6%</a:t>
+                        <a:t>Fleet Book %: 13.4%</a:t>
                       </a:r>
                     </a:p>
                   </a:txBody>
@@ -3766,7 +3766,7 @@
                         <a:rPr sz="900">
                           <a:latin typeface="Segoe UI"/>
                         </a:rPr>
-                        <a:t>Non-Fleet Subs: 514  |  Binds: 34</a:t>
+                        <a:t>Non-Fleet Subs: 515  |  Binds: 35</a:t>
                       </a:r>
                     </a:p>
                   </a:txBody>
@@ -3803,7 +3803,7 @@
                         <a:rPr sz="900">
                           <a:latin typeface="Segoe UI"/>
                         </a:rPr>
-                        <a:t>Non-Fleet Bound Premium: $734,036.91</a:t>
+                        <a:t>Non-Fleet Bound Premium: $735,128.57</a:t>
                       </a:r>
                     </a:p>
                   </a:txBody>
@@ -3840,7 +3840,7 @@
                         <a:rPr sz="900">
                           <a:latin typeface="Segoe UI"/>
                         </a:rPr>
-                        <a:t>Non-Fleet Book %: 86.4%</a:t>
+                        <a:t>Non-Fleet Book %: 86.6%</a:t>
                       </a:r>
                     </a:p>
                   </a:txBody>
@@ -4428,7 +4428,7 @@
                           </a:solidFill>
                           <a:latin typeface="Segoe UI"/>
                         </a:rPr>
-                        <a:t>79</a:t>
+                        <a:t>81</a:t>
                       </a:r>
                     </a:p>
                   </a:txBody>
@@ -4581,7 +4581,7 @@
                         <a:rPr sz="800">
                           <a:latin typeface="Segoe UI"/>
                         </a:rPr>
-                        <a:t>15.3%</a:t>
+                        <a:t>16.9%</a:t>
                       </a:r>
                     </a:p>
                   </a:txBody>
@@ -4707,7 +4707,7 @@
                           </a:solidFill>
                           <a:latin typeface="Segoe UI"/>
                         </a:rPr>
-                        <a:t>11.4%</a:t>
+                        <a:t>12.3%</a:t>
                       </a:r>
                     </a:p>
                   </a:txBody>
@@ -4866,7 +4866,7 @@
                         <a:rPr sz="800">
                           <a:latin typeface="Segoe UI"/>
                         </a:rPr>
-                        <a:t>18</a:t>
+                        <a:t>20</a:t>
                       </a:r>
                     </a:p>
                   </a:txBody>
@@ -4983,7 +4983,7 @@
                           </a:solidFill>
                           <a:latin typeface="Segoe UI"/>
                         </a:rPr>
-                        <a:t>9</a:t>
+                        <a:t>10</a:t>
                       </a:r>
                     </a:p>
                   </a:txBody>

--- a/generated/Tier 1 Broker Scorecards/Safer Haul Inc_Broker_Scorecard.pptx
+++ b/generated/Tier 1 Broker Scorecards/Safer Haul Inc_Broker_Scorecard.pptx
@@ -3357,7 +3357,7 @@
                         <a:rPr sz="800">
                           <a:latin typeface="Segoe UI"/>
                         </a:rPr>
-                        <a:t>$1,436,229.75 / $2,003,481.26 / $849,324.32</a:t>
+                        <a:t>$1,436,229.75 / $2,052,367.05 / $898,210.11</a:t>
                       </a:r>
                     </a:p>
                   </a:txBody>
@@ -3394,7 +3394,7 @@
                         <a:rPr sz="900">
                           <a:latin typeface="Segoe UI"/>
                         </a:rPr>
-                        <a:t>Tier 1  |  6.72% / 15.00%</a:t>
+                        <a:t>Tier 1  |  6.89% / 15.00%</a:t>
                       </a:r>
                     </a:p>
                   </a:txBody>
@@ -3431,7 +3431,7 @@
                         <a:rPr sz="900">
                           <a:latin typeface="Segoe UI"/>
                         </a:rPr>
-                        <a:t>$2,010,721.65  (42.2% achieved)</a:t>
+                        <a:t>$2,010,721.65  (44.7% achieved)</a:t>
                       </a:r>
                     </a:p>
                   </a:txBody>
@@ -3653,7 +3653,7 @@
                         <a:rPr sz="900">
                           <a:latin typeface="Segoe UI"/>
                         </a:rPr>
-                        <a:t>Fleet Subs: 21  |  Binds: 1</a:t>
+                        <a:t>Fleet Subs: 22  |  Binds: 1</a:t>
                       </a:r>
                     </a:p>
                   </a:txBody>
@@ -3690,7 +3690,7 @@
                         <a:rPr sz="900">
                           <a:latin typeface="Segoe UI"/>
                         </a:rPr>
-                        <a:t>Fleet Bound Premium: $114,195.75</a:t>
+                        <a:t>Fleet Bound Premium: $92,854.89</a:t>
                       </a:r>
                     </a:p>
                   </a:txBody>
@@ -3727,7 +3727,7 @@
                         <a:rPr sz="900">
                           <a:latin typeface="Segoe UI"/>
                         </a:rPr>
-                        <a:t>Fleet Book %: 13.4%</a:t>
+                        <a:t>Fleet Book %: 10.3%</a:t>
                       </a:r>
                     </a:p>
                   </a:txBody>
@@ -3766,7 +3766,7 @@
                         <a:rPr sz="900">
                           <a:latin typeface="Segoe UI"/>
                         </a:rPr>
-                        <a:t>Non-Fleet Subs: 515  |  Binds: 35</a:t>
+                        <a:t>Non-Fleet Subs: 515  |  Binds: 36</a:t>
                       </a:r>
                     </a:p>
                   </a:txBody>
@@ -3803,7 +3803,7 @@
                         <a:rPr sz="900">
                           <a:latin typeface="Segoe UI"/>
                         </a:rPr>
-                        <a:t>Non-Fleet Bound Premium: $735,128.57</a:t>
+                        <a:t>Non-Fleet Bound Premium: $805,355.22</a:t>
                       </a:r>
                     </a:p>
                   </a:txBody>
@@ -3840,7 +3840,7 @@
                         <a:rPr sz="900">
                           <a:latin typeface="Segoe UI"/>
                         </a:rPr>
-                        <a:t>Non-Fleet Book %: 86.6%</a:t>
+                        <a:t>Non-Fleet Book %: 89.7%</a:t>
                       </a:r>
                     </a:p>
                   </a:txBody>
@@ -4428,7 +4428,7 @@
                           </a:solidFill>
                           <a:latin typeface="Segoe UI"/>
                         </a:rPr>
-                        <a:t>81</a:t>
+                        <a:t>82</a:t>
                       </a:r>
                     </a:p>
                   </a:txBody>
@@ -4581,7 +4581,7 @@
                         <a:rPr sz="800">
                           <a:latin typeface="Segoe UI"/>
                         </a:rPr>
-                        <a:t>16.9%</a:t>
+                        <a:t>15.3%</a:t>
                       </a:r>
                     </a:p>
                   </a:txBody>
@@ -4707,7 +4707,7 @@
                           </a:solidFill>
                           <a:latin typeface="Segoe UI"/>
                         </a:rPr>
-                        <a:t>12.3%</a:t>
+                        <a:t>12.2%</a:t>
                       </a:r>
                     </a:p>
                   </a:txBody>
@@ -4747,7 +4747,7 @@
                         <a:rPr sz="800">
                           <a:latin typeface="Segoe UI"/>
                         </a:rPr>
-                        <a:t>12.2%</a:t>
+                        <a:t>14.3%</a:t>
                       </a:r>
                     </a:p>
                   </a:txBody>
@@ -4866,7 +4866,7 @@
                         <a:rPr sz="800">
                           <a:latin typeface="Segoe UI"/>
                         </a:rPr>
-                        <a:t>20</a:t>
+                        <a:t>18</a:t>
                       </a:r>
                     </a:p>
                   </a:txBody>
@@ -5020,7 +5020,7 @@
                         <a:rPr sz="800">
                           <a:latin typeface="Segoe UI"/>
                         </a:rPr>
-                        <a:t>12</a:t>
+                        <a:t>14</a:t>
                       </a:r>
                     </a:p>
                   </a:txBody>
@@ -5262,7 +5262,7 @@
                           </a:solidFill>
                           <a:latin typeface="Segoe UI"/>
                         </a:rPr>
-                        <a:t>$88.3K</a:t>
+                        <a:t>$137.2K</a:t>
                       </a:r>
                     </a:p>
                   </a:txBody>

--- a/generated/Tier 1 Broker Scorecards/Safer Haul Inc_Broker_Scorecard.pptx
+++ b/generated/Tier 1 Broker Scorecards/Safer Haul Inc_Broker_Scorecard.pptx
@@ -3394,7 +3394,7 @@
                         <a:rPr sz="900">
                           <a:latin typeface="Segoe UI"/>
                         </a:rPr>
-                        <a:t>Tier 1  |  6.89% / 15.00%</a:t>
+                        <a:t>Tier 1  |  6.62% / 15.00%</a:t>
                       </a:r>
                     </a:p>
                   </a:txBody>
@@ -3690,7 +3690,7 @@
                         <a:rPr sz="900">
                           <a:latin typeface="Segoe UI"/>
                         </a:rPr>
-                        <a:t>Fleet Bound Premium: $92,854.89</a:t>
+                        <a:t>Fleet Bound Premium: $95,358.04</a:t>
                       </a:r>
                     </a:p>
                   </a:txBody>
@@ -3727,7 +3727,7 @@
                         <a:rPr sz="900">
                           <a:latin typeface="Segoe UI"/>
                         </a:rPr>
-                        <a:t>Fleet Book %: 10.3%</a:t>
+                        <a:t>Fleet Book %: 10.6%</a:t>
                       </a:r>
                     </a:p>
                   </a:txBody>
@@ -3766,7 +3766,7 @@
                         <a:rPr sz="900">
                           <a:latin typeface="Segoe UI"/>
                         </a:rPr>
-                        <a:t>Non-Fleet Subs: 515  |  Binds: 36</a:t>
+                        <a:t>Non-Fleet Subs: 522  |  Binds: 35</a:t>
                       </a:r>
                     </a:p>
                   </a:txBody>
@@ -3803,7 +3803,7 @@
                         <a:rPr sz="900">
                           <a:latin typeface="Segoe UI"/>
                         </a:rPr>
-                        <a:t>Non-Fleet Bound Premium: $805,355.22</a:t>
+                        <a:t>Non-Fleet Bound Premium: $802,852.07</a:t>
                       </a:r>
                     </a:p>
                   </a:txBody>
@@ -3840,7 +3840,7 @@
                         <a:rPr sz="900">
                           <a:latin typeface="Segoe UI"/>
                         </a:rPr>
-                        <a:t>Non-Fleet Book %: 89.7%</a:t>
+                        <a:t>Non-Fleet Book %: 89.4%</a:t>
                       </a:r>
                     </a:p>
                   </a:txBody>
@@ -4428,7 +4428,7 @@
                           </a:solidFill>
                           <a:latin typeface="Segoe UI"/>
                         </a:rPr>
-                        <a:t>82</a:t>
+                        <a:t>90</a:t>
                       </a:r>
                     </a:p>
                   </a:txBody>
@@ -4581,7 +4581,7 @@
                         <a:rPr sz="800">
                           <a:latin typeface="Segoe UI"/>
                         </a:rPr>
-                        <a:t>15.3%</a:t>
+                        <a:t>16.9%</a:t>
                       </a:r>
                     </a:p>
                   </a:txBody>
@@ -4664,7 +4664,7 @@
                         <a:rPr sz="800">
                           <a:latin typeface="Segoe UI"/>
                         </a:rPr>
-                        <a:t>16.2%</a:t>
+                        <a:t>17.1%</a:t>
                       </a:r>
                     </a:p>
                   </a:txBody>
@@ -4707,7 +4707,7 @@
                           </a:solidFill>
                           <a:latin typeface="Segoe UI"/>
                         </a:rPr>
-                        <a:t>12.2%</a:t>
+                        <a:t>11.1%</a:t>
                       </a:r>
                     </a:p>
                   </a:txBody>
@@ -4747,7 +4747,7 @@
                         <a:rPr sz="800">
                           <a:latin typeface="Segoe UI"/>
                         </a:rPr>
-                        <a:t>14.3%</a:t>
+                        <a:t>13.3%</a:t>
                       </a:r>
                     </a:p>
                   </a:txBody>
@@ -4866,7 +4866,7 @@
                         <a:rPr sz="800">
                           <a:latin typeface="Segoe UI"/>
                         </a:rPr>
-                        <a:t>18</a:t>
+                        <a:t>20</a:t>
                       </a:r>
                     </a:p>
                   </a:txBody>
@@ -4943,7 +4943,7 @@
                         <a:rPr sz="800">
                           <a:latin typeface="Segoe UI"/>
                         </a:rPr>
-                        <a:t>18</a:t>
+                        <a:t>19</a:t>
                       </a:r>
                     </a:p>
                   </a:txBody>
@@ -5020,7 +5020,7 @@
                         <a:rPr sz="800">
                           <a:latin typeface="Segoe UI"/>
                         </a:rPr>
-                        <a:t>14</a:t>
+                        <a:t>13</a:t>
                       </a:r>
                     </a:p>
                   </a:txBody>

--- a/generated/Tier 1 Broker Scorecards/Safer Haul Inc_Broker_Scorecard.pptx
+++ b/generated/Tier 1 Broker Scorecards/Safer Haul Inc_Broker_Scorecard.pptx
@@ -4581,7 +4581,7 @@
                         <a:rPr sz="800">
                           <a:latin typeface="Segoe UI"/>
                         </a:rPr>
-                        <a:t>16.9%</a:t>
+                        <a:t>16.1%</a:t>
                       </a:r>
                     </a:p>
                   </a:txBody>
@@ -4664,7 +4664,7 @@
                         <a:rPr sz="800">
                           <a:latin typeface="Segoe UI"/>
                         </a:rPr>
-                        <a:t>17.1%</a:t>
+                        <a:t>16.2%</a:t>
                       </a:r>
                     </a:p>
                   </a:txBody>
@@ -4866,7 +4866,7 @@
                         <a:rPr sz="800">
                           <a:latin typeface="Segoe UI"/>
                         </a:rPr>
-                        <a:t>20</a:t>
+                        <a:t>19</a:t>
                       </a:r>
                     </a:p>
                   </a:txBody>
@@ -4943,7 +4943,7 @@
                         <a:rPr sz="800">
                           <a:latin typeface="Segoe UI"/>
                         </a:rPr>
-                        <a:t>19</a:t>
+                        <a:t>18</a:t>
                       </a:r>
                     </a:p>
                   </a:txBody>

--- a/generated/Tier 1 Broker Scorecards/Safer Haul Inc_Broker_Scorecard.pptx
+++ b/generated/Tier 1 Broker Scorecards/Safer Haul Inc_Broker_Scorecard.pptx
@@ -3357,7 +3357,7 @@
                         <a:rPr sz="800">
                           <a:latin typeface="Segoe UI"/>
                         </a:rPr>
-                        <a:t>$1,436,229.75 / $2,052,367.05 / $898,210.11</a:t>
+                        <a:t>$1,436,229.75 / $2,001,170.02 / $913,579.17</a:t>
                       </a:r>
                     </a:p>
                   </a:txBody>
@@ -3431,7 +3431,7 @@
                         <a:rPr sz="900">
                           <a:latin typeface="Segoe UI"/>
                         </a:rPr>
-                        <a:t>$2,010,721.65  (44.7% achieved)</a:t>
+                        <a:t>$2,010,721.65  (45.4% achieved)</a:t>
                       </a:r>
                     </a:p>
                   </a:txBody>
@@ -3690,7 +3690,7 @@
                         <a:rPr sz="900">
                           <a:latin typeface="Segoe UI"/>
                         </a:rPr>
-                        <a:t>Fleet Bound Premium: $95,358.04</a:t>
+                        <a:t>Fleet Bound Premium: $96,989.69</a:t>
                       </a:r>
                     </a:p>
                   </a:txBody>
@@ -3803,7 +3803,7 @@
                         <a:rPr sz="900">
                           <a:latin typeface="Segoe UI"/>
                         </a:rPr>
-                        <a:t>Non-Fleet Bound Premium: $802,852.07</a:t>
+                        <a:t>Non-Fleet Bound Premium: $816,589.48</a:t>
                       </a:r>
                     </a:p>
                   </a:txBody>
@@ -4581,7 +4581,7 @@
                         <a:rPr sz="800">
                           <a:latin typeface="Segoe UI"/>
                         </a:rPr>
-                        <a:t>16.1%</a:t>
+                        <a:t>15.3%</a:t>
                       </a:r>
                     </a:p>
                   </a:txBody>
@@ -4747,7 +4747,7 @@
                         <a:rPr sz="800">
                           <a:latin typeface="Segoe UI"/>
                         </a:rPr>
-                        <a:t>13.3%</a:t>
+                        <a:t>12.2%</a:t>
                       </a:r>
                     </a:p>
                   </a:txBody>
@@ -4866,7 +4866,7 @@
                         <a:rPr sz="800">
                           <a:latin typeface="Segoe UI"/>
                         </a:rPr>
-                        <a:t>19</a:t>
+                        <a:t>18</a:t>
                       </a:r>
                     </a:p>
                   </a:txBody>
@@ -5020,7 +5020,7 @@
                         <a:rPr sz="800">
                           <a:latin typeface="Segoe UI"/>
                         </a:rPr>
-                        <a:t>13</a:t>
+                        <a:t>12</a:t>
                       </a:r>
                     </a:p>
                   </a:txBody>
